--- a/magnetic_sim/ANSYS/main/figures/Paper_fig_V4.pptx
+++ b/magnetic_sim/ANSYS/main/figures/Paper_fig_V4.pptx
@@ -273,7 +273,7 @@
           <a:p>
             <a:fld id="{16D42070-5DAD-4E7E-A6F8-25E560BC7BBC}" type="datetimeFigureOut">
               <a:rPr lang="zh-TW" altLang="en-US" smtClean="0"/>
-              <a:t>2026/8/3</a:t>
+              <a:t>2026/8/4</a:t>
             </a:fld>
             <a:endParaRPr lang="zh-TW" altLang="en-US"/>
           </a:p>
@@ -471,7 +471,7 @@
           <a:p>
             <a:fld id="{16D42070-5DAD-4E7E-A6F8-25E560BC7BBC}" type="datetimeFigureOut">
               <a:rPr lang="zh-TW" altLang="en-US" smtClean="0"/>
-              <a:t>2026/8/3</a:t>
+              <a:t>2026/8/4</a:t>
             </a:fld>
             <a:endParaRPr lang="zh-TW" altLang="en-US"/>
           </a:p>
@@ -679,7 +679,7 @@
           <a:p>
             <a:fld id="{16D42070-5DAD-4E7E-A6F8-25E560BC7BBC}" type="datetimeFigureOut">
               <a:rPr lang="zh-TW" altLang="en-US" smtClean="0"/>
-              <a:t>2026/8/3</a:t>
+              <a:t>2026/8/4</a:t>
             </a:fld>
             <a:endParaRPr lang="zh-TW" altLang="en-US"/>
           </a:p>
@@ -877,7 +877,7 @@
           <a:p>
             <a:fld id="{16D42070-5DAD-4E7E-A6F8-25E560BC7BBC}" type="datetimeFigureOut">
               <a:rPr lang="zh-TW" altLang="en-US" smtClean="0"/>
-              <a:t>2026/8/3</a:t>
+              <a:t>2026/8/4</a:t>
             </a:fld>
             <a:endParaRPr lang="zh-TW" altLang="en-US"/>
           </a:p>
@@ -1152,7 +1152,7 @@
           <a:p>
             <a:fld id="{16D42070-5DAD-4E7E-A6F8-25E560BC7BBC}" type="datetimeFigureOut">
               <a:rPr lang="zh-TW" altLang="en-US" smtClean="0"/>
-              <a:t>2026/8/3</a:t>
+              <a:t>2026/8/4</a:t>
             </a:fld>
             <a:endParaRPr lang="zh-TW" altLang="en-US"/>
           </a:p>
@@ -1417,7 +1417,7 @@
           <a:p>
             <a:fld id="{16D42070-5DAD-4E7E-A6F8-25E560BC7BBC}" type="datetimeFigureOut">
               <a:rPr lang="zh-TW" altLang="en-US" smtClean="0"/>
-              <a:t>2026/8/3</a:t>
+              <a:t>2026/8/4</a:t>
             </a:fld>
             <a:endParaRPr lang="zh-TW" altLang="en-US"/>
           </a:p>
@@ -1829,7 +1829,7 @@
           <a:p>
             <a:fld id="{16D42070-5DAD-4E7E-A6F8-25E560BC7BBC}" type="datetimeFigureOut">
               <a:rPr lang="zh-TW" altLang="en-US" smtClean="0"/>
-              <a:t>2026/8/3</a:t>
+              <a:t>2026/8/4</a:t>
             </a:fld>
             <a:endParaRPr lang="zh-TW" altLang="en-US"/>
           </a:p>
@@ -1970,7 +1970,7 @@
           <a:p>
             <a:fld id="{16D42070-5DAD-4E7E-A6F8-25E560BC7BBC}" type="datetimeFigureOut">
               <a:rPr lang="zh-TW" altLang="en-US" smtClean="0"/>
-              <a:t>2026/8/3</a:t>
+              <a:t>2026/8/4</a:t>
             </a:fld>
             <a:endParaRPr lang="zh-TW" altLang="en-US"/>
           </a:p>
@@ -2083,7 +2083,7 @@
           <a:p>
             <a:fld id="{16D42070-5DAD-4E7E-A6F8-25E560BC7BBC}" type="datetimeFigureOut">
               <a:rPr lang="zh-TW" altLang="en-US" smtClean="0"/>
-              <a:t>2026/8/3</a:t>
+              <a:t>2026/8/4</a:t>
             </a:fld>
             <a:endParaRPr lang="zh-TW" altLang="en-US"/>
           </a:p>
@@ -2394,7 +2394,7 @@
           <a:p>
             <a:fld id="{16D42070-5DAD-4E7E-A6F8-25E560BC7BBC}" type="datetimeFigureOut">
               <a:rPr lang="zh-TW" altLang="en-US" smtClean="0"/>
-              <a:t>2026/8/3</a:t>
+              <a:t>2026/8/4</a:t>
             </a:fld>
             <a:endParaRPr lang="zh-TW" altLang="en-US"/>
           </a:p>
@@ -2682,7 +2682,7 @@
           <a:p>
             <a:fld id="{16D42070-5DAD-4E7E-A6F8-25E560BC7BBC}" type="datetimeFigureOut">
               <a:rPr lang="zh-TW" altLang="en-US" smtClean="0"/>
-              <a:t>2026/8/3</a:t>
+              <a:t>2026/8/4</a:t>
             </a:fld>
             <a:endParaRPr lang="zh-TW" altLang="en-US"/>
           </a:p>
@@ -2923,7 +2923,7 @@
           <a:p>
             <a:fld id="{16D42070-5DAD-4E7E-A6F8-25E560BC7BBC}" type="datetimeFigureOut">
               <a:rPr lang="zh-TW" altLang="en-US" smtClean="0"/>
-              <a:t>2026/8/3</a:t>
+              <a:t>2026/8/4</a:t>
             </a:fld>
             <a:endParaRPr lang="zh-TW" altLang="en-US"/>
           </a:p>
@@ -8042,8 +8042,8 @@
           </mc:Fallback>
         </mc:AlternateContent>
       </p:grpSp>
-      <mc:AlternateContent xmlns:mc="http://schemas.openxmlformats.org/markup-compatibility/2006">
-        <mc:Choice xmlns:a14="http://schemas.microsoft.com/office/drawing/2010/main" Requires="a14">
+      <mc:AlternateContent xmlns:mc="http://schemas.openxmlformats.org/markup-compatibility/2006" xmlns:a14="http://schemas.microsoft.com/office/drawing/2010/main">
+        <mc:Choice Requires="a14">
           <p:sp>
             <p:nvSpPr>
               <p:cNvPr id="20" name="文字方塊 19">
@@ -8152,7 +8152,7 @@
             </p:txBody>
           </p:sp>
         </mc:Choice>
-        <mc:Fallback>
+        <mc:Fallback xmlns="">
           <p:sp>
             <p:nvSpPr>
               <p:cNvPr id="20" name="文字方塊 19">
@@ -24345,8 +24345,8 @@
           </a:p>
         </p:txBody>
       </p:sp>
-      <mc:AlternateContent xmlns:mc="http://schemas.openxmlformats.org/markup-compatibility/2006" xmlns:a14="http://schemas.microsoft.com/office/drawing/2010/main">
-        <mc:Choice Requires="a14">
+      <mc:AlternateContent xmlns:mc="http://schemas.openxmlformats.org/markup-compatibility/2006">
+        <mc:Choice xmlns:a14="http://schemas.microsoft.com/office/drawing/2010/main" Requires="a14">
           <p:sp>
             <p:nvSpPr>
               <p:cNvPr id="16" name="文字方塊 15">
@@ -24730,7 +24730,13 @@
                                               <a:rPr lang="en-US" altLang="zh-TW" b="0" i="1" smtClean="0">
                                                 <a:latin typeface="Cambria Math" panose="02040503050406030204" pitchFamily="18" charset="0"/>
                                               </a:rPr>
-                                              <m:t>.8309</m:t>
+                                              <m:t>.83</m:t>
+                                            </m:r>
+                                            <m:r>
+                                              <a:rPr lang="en-US" altLang="zh-TW" b="0" i="1" smtClean="0">
+                                                <a:latin typeface="Cambria Math" panose="02040503050406030204" pitchFamily="18" charset="0"/>
+                                              </a:rPr>
+                                              <m:t>40</m:t>
                                             </m:r>
                                           </m:e>
                                           <m:e>
@@ -25242,7 +25248,7 @@
             </p:txBody>
           </p:sp>
         </mc:Choice>
-        <mc:Fallback xmlns="">
+        <mc:Fallback>
           <p:sp>
             <p:nvSpPr>
               <p:cNvPr id="16" name="文字方塊 15">
